--- a/PPTs/Lecture 12-13Exercises ANS.pptx
+++ b/PPTs/Lecture 12-13Exercises ANS.pptx
@@ -5,36 +5,37 @@
     <p:sldMasterId id="2147483670" r:id="rId1"/>
   </p:sldMasterIdLst>
   <p:notesMasterIdLst>
-    <p:notesMasterId r:id="rId5"/>
+    <p:notesMasterId r:id="rId6"/>
   </p:notesMasterIdLst>
   <p:sldIdLst>
     <p:sldId id="291" r:id="rId2"/>
     <p:sldId id="285" r:id="rId3"/>
     <p:sldId id="292" r:id="rId4"/>
+    <p:sldId id="293" r:id="rId5"/>
   </p:sldIdLst>
   <p:sldSz cx="9144000" cy="5143500" type="screen16x9"/>
   <p:notesSz cx="6858000" cy="9144000"/>
   <p:embeddedFontLst>
     <p:embeddedFont>
       <p:font typeface="Roboto" panose="02000000000000000000" pitchFamily="2" charset="0"/>
-      <p:regular r:id="rId6"/>
-      <p:bold r:id="rId7"/>
-      <p:italic r:id="rId8"/>
-      <p:boldItalic r:id="rId9"/>
+      <p:regular r:id="rId7"/>
+      <p:bold r:id="rId8"/>
+      <p:italic r:id="rId9"/>
+      <p:boldItalic r:id="rId10"/>
     </p:embeddedFont>
     <p:embeddedFont>
       <p:font typeface="Roboto Light" panose="02000000000000000000" pitchFamily="2" charset="0"/>
-      <p:regular r:id="rId10"/>
-      <p:bold r:id="rId11"/>
-      <p:italic r:id="rId12"/>
-      <p:boldItalic r:id="rId13"/>
+      <p:regular r:id="rId11"/>
+      <p:bold r:id="rId12"/>
+      <p:italic r:id="rId13"/>
+      <p:boldItalic r:id="rId14"/>
     </p:embeddedFont>
     <p:embeddedFont>
       <p:font typeface="Roboto Medium" panose="02000000000000000000" pitchFamily="2" charset="0"/>
-      <p:regular r:id="rId14"/>
-      <p:bold r:id="rId15"/>
-      <p:italic r:id="rId16"/>
-      <p:boldItalic r:id="rId17"/>
+      <p:regular r:id="rId15"/>
+      <p:bold r:id="rId16"/>
+      <p:italic r:id="rId17"/>
+      <p:boldItalic r:id="rId18"/>
     </p:embeddedFont>
   </p:embeddedFontLst>
   <p:defaultTextStyle>
@@ -16805,15 +16806,7 @@
             </a:r>
             <a:r>
               <a:rPr lang="en-US" altLang="zh-CN" dirty="0"/>
-              <a:t> packet is #21, so this is the start of our window. The window size was 5, but in slow-start mode, each new ack increases our window by 1. The ack for </a:t>
-            </a:r>
-            <a:r>
-              <a:rPr lang="en-US" altLang="zh-CN"/>
-              <a:t>#21 </a:t>
-            </a:r>
-            <a:r>
-              <a:rPr lang="en-US" altLang="zh-CN" dirty="0"/>
-              <a:t>has increased our window to 5 + 1 = 6. Our window starts at #21 and is 6 packets large, so it allows us to send #21 through #26, inclusive</a:t>
+              <a:t> packet is #21, so this is the start of our window. The window size was 5, but in slow-start mode, each new ack increases our window by 1. The ack for #21 has increased our window to 5 + 1 = 6. Our window starts at #21 and is 6 packets large, so it allows us to send #21 through #26, inclusive</a:t>
             </a:r>
             <a:endParaRPr lang="zh-CN" altLang="en-US" dirty="0"/>
           </a:p>
@@ -16823,6 +16816,171 @@
     <p:extLst>
       <p:ext uri="{BB962C8B-B14F-4D97-AF65-F5344CB8AC3E}">
         <p14:creationId xmlns:p14="http://schemas.microsoft.com/office/powerpoint/2010/main" val="2224016152"/>
+      </p:ext>
+    </p:extLst>
+  </p:cSld>
+  <p:clrMapOvr>
+    <a:masterClrMapping/>
+  </p:clrMapOvr>
+</p:sld>
+</file>
+
+<file path=ppt/slides/slide4.xml><?xml version="1.0" encoding="utf-8"?>
+<p:sld xmlns:a="http://schemas.openxmlformats.org/drawingml/2006/main" xmlns:r="http://schemas.openxmlformats.org/officeDocument/2006/relationships" xmlns:p="http://schemas.openxmlformats.org/presentationml/2006/main">
+  <p:cSld>
+    <p:spTree>
+      <p:nvGrpSpPr>
+        <p:cNvPr id="1" name=""/>
+        <p:cNvGrpSpPr/>
+        <p:nvPr/>
+      </p:nvGrpSpPr>
+      <p:grpSpPr>
+        <a:xfrm>
+          <a:off x="0" y="0"/>
+          <a:ext cx="0" cy="0"/>
+          <a:chOff x="0" y="0"/>
+          <a:chExt cx="0" cy="0"/>
+        </a:xfrm>
+      </p:grpSpPr>
+      <p:sp>
+        <p:nvSpPr>
+          <p:cNvPr id="2" name="Title 1">
+            <a:extLst>
+              <a:ext uri="{FF2B5EF4-FFF2-40B4-BE49-F238E27FC236}">
+                <a16:creationId xmlns:a16="http://schemas.microsoft.com/office/drawing/2014/main" id="{CBBDB188-683A-66BE-2164-9F2129F3043C}"/>
+              </a:ext>
+            </a:extLst>
+          </p:cNvPr>
+          <p:cNvSpPr>
+            <a:spLocks noGrp="1"/>
+          </p:cNvSpPr>
+          <p:nvPr>
+            <p:ph type="title"/>
+          </p:nvPr>
+        </p:nvSpPr>
+        <p:spPr/>
+        <p:txBody>
+          <a:bodyPr/>
+          <a:lstStyle/>
+          <a:p>
+            <a:endParaRPr lang="zh-CN" altLang="en-US"/>
+          </a:p>
+        </p:txBody>
+      </p:sp>
+      <p:sp>
+        <p:nvSpPr>
+          <p:cNvPr id="3" name="Text Placeholder 2">
+            <a:extLst>
+              <a:ext uri="{FF2B5EF4-FFF2-40B4-BE49-F238E27FC236}">
+                <a16:creationId xmlns:a16="http://schemas.microsoft.com/office/drawing/2014/main" id="{5608D57F-2A07-AB97-AC47-725882553BE1}"/>
+              </a:ext>
+            </a:extLst>
+          </p:cNvPr>
+          <p:cNvSpPr>
+            <a:spLocks noGrp="1"/>
+          </p:cNvSpPr>
+          <p:nvPr>
+            <p:ph type="body" idx="1"/>
+          </p:nvPr>
+        </p:nvSpPr>
+        <p:spPr/>
+        <p:txBody>
+          <a:bodyPr/>
+          <a:lstStyle/>
+          <a:p>
+            <a:pPr marL="114300" indent="0">
+              <a:buNone/>
+            </a:pPr>
+            <a:r>
+              <a:rPr lang="en-US" altLang="zh-CN" dirty="0"/>
+              <a:t>The rest of this question is independent of earlier subparts. Each subpart continues on from the previous one.</a:t>
+            </a:r>
+          </a:p>
+          <a:p>
+            <a:pPr marL="114300" indent="0">
+              <a:buNone/>
+            </a:pPr>
+            <a:r>
+              <a:rPr lang="en-US" altLang="zh-CN" dirty="0"/>
+              <a:t>Some time later, you are in Slow Start mode, with the following settings:</a:t>
+            </a:r>
+          </a:p>
+          <a:p>
+            <a:pPr marL="114300" indent="0">
+              <a:buNone/>
+            </a:pPr>
+            <a:r>
+              <a:rPr lang="en-US" altLang="zh-CN" dirty="0"/>
+              <a:t>• CWND = 14, SSTHRESH = ∞</a:t>
+            </a:r>
+          </a:p>
+          <a:p>
+            <a:pPr marL="114300" indent="0">
+              <a:buNone/>
+            </a:pPr>
+            <a:r>
+              <a:rPr lang="en-US" altLang="zh-CN" dirty="0"/>
+              <a:t>• All packets up to, and including packet #30, have been sent and </a:t>
+            </a:r>
+            <a:r>
+              <a:rPr lang="en-US" altLang="zh-CN" dirty="0" err="1"/>
+              <a:t>acked</a:t>
+            </a:r>
+            <a:r>
+              <a:rPr lang="en-US" altLang="zh-CN" dirty="0"/>
+              <a:t>.</a:t>
+            </a:r>
+          </a:p>
+          <a:p>
+            <a:pPr marL="114300" indent="0">
+              <a:buNone/>
+            </a:pPr>
+            <a:r>
+              <a:rPr lang="en-US" altLang="zh-CN" dirty="0"/>
+              <a:t>• Packets #31 through #44, inclusive, have been sent, but not </a:t>
+            </a:r>
+            <a:r>
+              <a:rPr lang="en-US" altLang="zh-CN" dirty="0" err="1"/>
+              <a:t>acked</a:t>
+            </a:r>
+            <a:r>
+              <a:rPr lang="en-US" altLang="zh-CN" dirty="0"/>
+              <a:t>.</a:t>
+            </a:r>
+          </a:p>
+          <a:p>
+            <a:pPr marL="114300" indent="0">
+              <a:buNone/>
+            </a:pPr>
+            <a:r>
+              <a:rPr lang="en-US" altLang="zh-CN" dirty="0"/>
+              <a:t>• All packets #45 and later have not been sent.</a:t>
+            </a:r>
+          </a:p>
+          <a:p>
+            <a:pPr marL="114300" indent="0">
+              <a:buNone/>
+            </a:pPr>
+            <a:r>
+              <a:rPr lang="en-US" altLang="zh-CN" dirty="0"/>
+              <a:t>Suppose that packet #31 is dropped in transit. All other packets are successfully sent, and </a:t>
+            </a:r>
+            <a:r>
+              <a:rPr lang="en-US" altLang="zh-CN"/>
+              <a:t>the receiver sends </a:t>
+            </a:r>
+            <a:r>
+              <a:rPr lang="en-US" altLang="zh-CN" dirty="0"/>
+              <a:t>you acks for packets #32, #33, #34, etc., in that order, with no timeouts.</a:t>
+            </a:r>
+            <a:endParaRPr lang="zh-CN" altLang="en-US" dirty="0"/>
+          </a:p>
+        </p:txBody>
+      </p:sp>
+    </p:spTree>
+    <p:extLst>
+      <p:ext uri="{BB962C8B-B14F-4D97-AF65-F5344CB8AC3E}">
+        <p14:creationId xmlns:p14="http://schemas.microsoft.com/office/powerpoint/2010/main" val="3728591699"/>
       </p:ext>
     </p:extLst>
   </p:cSld>
